--- a/deck/Путешествие сквозь тысячелетия.pptx
+++ b/deck/Путешествие сквозь тысячелетия.pptx
@@ -111,27 +111,27 @@
   <p:extLst>
     <p:ext uri="{521415D9-36F7-43E2-AB2F-B90AF26B5E84}">
       <p14:sectionLst xmlns:p14="http://schemas.microsoft.com/office/powerpoint/2010/main">
-        <p14:section name="Открытие" id="{08144dcb-8bdf-bae7-ba46-7c5d02a078b9}">
+        <p14:section name="Открытие" id="{f78f0ded-d634-113e-92c5-9edb1472c81f}">
           <p14:sldIdLst>
             <p14:sldId id="256"/>
           </p14:sldIdLst>
         </p14:section>
-        <p14:section name="Проблема" id="{40c3cf73-0afc-b423-b343-0ed44282186e}">
+        <p14:section name="Проблема" id="{531a25e9-5962-99d8-eb73-739483201bfb}">
           <p14:sldIdLst>
             <p14:sldId id="257"/>
           </p14:sldIdLst>
         </p14:section>
-        <p14:section name="Решение" id="{3deadab6-8c80-bb4b-6098-e2214a55ddb2}">
+        <p14:section name="Решение" id="{0b4750e4-a383-5ca9-c8b7-676363c963af}">
           <p14:sldIdLst>
             <p14:sldId id="258"/>
           </p14:sldIdLst>
         </p14:section>
-        <p14:section name="Внедрение" id="{4a53020c-a9a0-1da4-9fad-c3ac687e042a}">
+        <p14:section name="Внедрение" id="{d74f9497-9262-def8-b5db-2b4a3c178c32}">
           <p14:sldIdLst>
             <p14:sldId id="259"/>
           </p14:sldIdLst>
         </p14:section>
-        <p14:section name="Итог" id="{1e713dce-719f-ddee-97ac-3fa974c1f300}">
+        <p14:section name="Итог" id="{c9efce77-6642-ca59-2c22-ecab0f5156eb}">
           <p14:sldIdLst>
             <p14:sldId id="260"/>
           </p14:sldIdLst>
@@ -540,7 +540,7 @@
           <a:p>
             <a:r>
               <a:rPr lang="en-US" dirty="0"/>
-              <a:t>ЗАМЕНИТЬ «Фамилия Имя». Представиться и назвать проект одной фразой: игра, по которой школьник проходит историю Татарстана от Волжской Булгарии до наших дней.</a:t>
+              <a:t>Представиться и назвать проект одной фразой: игра, по которой школьник проходит историю Татарстана от Волжской Булгарии до наших дней.</a:t>
             </a:r>
             <a:endParaRPr lang="en-US" dirty="0"/>
           </a:p>
@@ -892,7 +892,7 @@
           <a:p>
             <a:r>
               <a:rPr lang="en-US" dirty="0"/>
-              <a:t>ЗАМЕНИТЬ «Фамилия Имя». Закончить на планах и поблагодарить.</a:t>
+              <a:t>Закончить на планах и поблагодарить.</a:t>
             </a:r>
             <a:endParaRPr lang="en-US" dirty="0"/>
           </a:p>
@@ -970,7 +970,7 @@
     <p:bg>
       <p:bgPr>
         <a:solidFill>
-          <a:srgbClr val="4A2420"/>
+          <a:srgbClr val="1C3A24"/>
         </a:solidFill>
       </p:bgPr>
     </p:bg>
@@ -1047,7 +1047,7 @@
             <a:r>
               <a:rPr lang="en-US" sz="1000" dirty="0">
                 <a:solidFill>
-                  <a:srgbClr val="7A736F"/>
+                  <a:srgbClr val="6E7B70"/>
                 </a:solidFill>
               </a:rPr>
               <a:t>Путешествие сквозь тысячелетия · квест по истории Татарстана</a:t>
@@ -1086,7 +1086,7 @@
             <a:lvl1pPr>
               <a:defRPr sz="1000">
                 <a:solidFill>
-                  <a:srgbClr val="7A736F"/>
+                  <a:srgbClr val="6E7B70"/>
                 </a:solidFill>
               </a:defRPr>
             </a:lvl1pPr>
@@ -1160,7 +1160,7 @@
             <a:r>
               <a:rPr lang="en-US" sz="1000" dirty="0">
                 <a:solidFill>
-                  <a:srgbClr val="7A736F"/>
+                  <a:srgbClr val="6E7B70"/>
                 </a:solidFill>
               </a:rPr>
               <a:t>Путешествие сквозь тысячелетия · квест по истории Татарстана</a:t>
@@ -1199,7 +1199,7 @@
             <a:lvl1pPr>
               <a:defRPr sz="1000">
                 <a:solidFill>
-                  <a:srgbClr val="7A736F"/>
+                  <a:srgbClr val="6E7B70"/>
                 </a:solidFill>
               </a:defRPr>
             </a:lvl1pPr>
@@ -1269,7 +1269,7 @@
             <a:lvl1pPr>
               <a:defRPr sz="1000">
                 <a:solidFill>
-                  <a:srgbClr val="7A736F"/>
+                  <a:srgbClr val="6E7B70"/>
                 </a:solidFill>
               </a:defRPr>
             </a:lvl1pPr>
@@ -1572,7 +1572,7 @@
         </p:nvSpPr>
         <p:spPr>
           <a:xfrm>
-            <a:off x="640080" y="1737360"/>
+            <a:off x="640080" y="1005840"/>
             <a:ext cx="8686800" cy="1645920"/>
           </a:xfrm>
           <a:prstGeom prst="rect">
@@ -1622,7 +1622,7 @@
         </p:nvSpPr>
         <p:spPr>
           <a:xfrm>
-            <a:off x="640080" y="3520440"/>
+            <a:off x="640080" y="2788920"/>
             <a:ext cx="8686800" cy="548640"/>
           </a:xfrm>
           <a:prstGeom prst="rect">
@@ -1641,7 +1641,7 @@
             <a:r>
               <a:rPr lang="en-US" sz="2000" dirty="0">
                 <a:solidFill>
-                  <a:srgbClr val="A7BEAE"/>
+                  <a:srgbClr val="97BC62"/>
                 </a:solidFill>
               </a:rPr>
               <a:t>Квест по истории Татарстана: от Волжской Булгарии до современности</a:t>
@@ -1658,7 +1658,7 @@
         </p:nvSpPr>
         <p:spPr>
           <a:xfrm>
-            <a:off x="640080" y="4069080"/>
+            <a:off x="640080" y="3337560"/>
             <a:ext cx="8686800" cy="457200"/>
           </a:xfrm>
           <a:prstGeom prst="rect">
@@ -1677,7 +1677,7 @@
             <a:r>
               <a:rPr lang="en-US" sz="1600" dirty="0">
                 <a:solidFill>
-                  <a:srgbClr val="D8CBC6"/>
+                  <a:srgbClr val="D3E0D2"/>
                 </a:solidFill>
               </a:rPr>
               <a:t>Для 5–11 классов · бесплатно · работает в браузере телефона</a:t>
@@ -1694,7 +1694,7 @@
         </p:nvSpPr>
         <p:spPr>
           <a:xfrm>
-            <a:off x="640080" y="4983480"/>
+            <a:off x="640080" y="4114800"/>
             <a:ext cx="9144000" cy="1463040"/>
           </a:xfrm>
           <a:prstGeom prst="rect">
@@ -1716,7 +1716,7 @@
                   <a:srgbClr val="FFFFFF"/>
                 </a:solidFill>
               </a:rPr>
-              <a:t>Фамилия Имя</a:t>
+              <a:t>Фаустов Радмир</a:t>
             </a:r>
             <a:endParaRPr lang="en-US" sz="1900" dirty="0"/>
           </a:p>
@@ -1727,7 +1727,7 @@
             <a:r>
               <a:rPr lang="en-US" sz="1500" dirty="0">
                 <a:solidFill>
-                  <a:srgbClr val="D8CBC6"/>
+                  <a:srgbClr val="D3E0D2"/>
                 </a:solidFill>
               </a:rPr>
               <a:t>Лицей-интернат имени Мустафы Онджеля</a:t>
@@ -1755,7 +1755,7 @@
             <a:r>
               <a:rPr lang="en-US" sz="1300" dirty="0">
                 <a:solidFill>
-                  <a:srgbClr val="A89189"/>
+                  <a:srgbClr val="9BB09C"/>
                 </a:solidFill>
               </a:rPr>
               <a:t>Школьный конкурс по технологическому предпринимательству · ИТ-парк Татарстана</a:t>
@@ -1816,7 +1816,7 @@
             <a:r>
               <a:rPr lang="en-US" sz="3800" b="1" dirty="0">
                 <a:solidFill>
-                  <a:srgbClr val="4A2420"/>
+                  <a:srgbClr val="1C3A24"/>
                 </a:solidFill>
               </a:rPr>
               <a:t>Курс ввели, а учиться по нему не по чему</a:t>
@@ -1846,7 +1846,7 @@
           </a:solidFill>
           <a:ln w="12700">
             <a:solidFill>
-              <a:srgbClr val="E0D9D4"/>
+              <a:srgbClr val="DCE4DA"/>
             </a:solidFill>
           </a:ln>
         </p:spPr>
@@ -1860,7 +1860,7 @@
             <a:r>
               <a:rPr lang="en-US" sz="3400" b="1" dirty="0">
                 <a:solidFill>
-                  <a:srgbClr val="B85042"/>
+                  <a:srgbClr val="2C5F2D"/>
                 </a:solidFill>
               </a:rPr>
               <a:t>512 000</a:t>
@@ -1888,7 +1888,7 @@
             <a:r>
               <a:rPr lang="en-US" sz="1300" dirty="0">
                 <a:solidFill>
-                  <a:srgbClr val="7A736F"/>
+                  <a:srgbClr val="6E7B70"/>
                 </a:solidFill>
               </a:rPr>
               <a:t>школьников в Татарстане — все изучают историю родного края</a:t>
@@ -1918,7 +1918,7 @@
           </a:solidFill>
           <a:ln w="12700">
             <a:solidFill>
-              <a:srgbClr val="E0D9D4"/>
+              <a:srgbClr val="DCE4DA"/>
             </a:solidFill>
           </a:ln>
         </p:spPr>
@@ -1932,7 +1932,7 @@
             <a:r>
               <a:rPr lang="en-US" sz="2800" b="1" dirty="0">
                 <a:solidFill>
-                  <a:srgbClr val="B85042"/>
+                  <a:srgbClr val="2C5F2D"/>
                 </a:solidFill>
               </a:rPr>
               <a:t>5–7 класс</a:t>
@@ -1960,7 +1960,7 @@
             <a:r>
               <a:rPr lang="en-US" sz="1300" dirty="0">
                 <a:solidFill>
-                  <a:srgbClr val="7A736F"/>
+                  <a:srgbClr val="6E7B70"/>
                 </a:solidFill>
               </a:rPr>
               <a:t>курс «История нашего края» введён с 2025/26 учебного года</a:t>
@@ -1990,7 +1990,7 @@
           </a:solidFill>
           <a:ln w="12700">
             <a:solidFill>
-              <a:srgbClr val="E0D9D4"/>
+              <a:srgbClr val="DCE4DA"/>
             </a:solidFill>
           </a:ln>
         </p:spPr>
@@ -2004,7 +2004,7 @@
             <a:r>
               <a:rPr lang="en-US" sz="2800" b="1" dirty="0">
                 <a:solidFill>
-                  <a:srgbClr val="B85042"/>
+                  <a:srgbClr val="2C5F2D"/>
                 </a:solidFill>
               </a:rPr>
               <a:t>32 региона</a:t>
@@ -2032,7 +2032,7 @@
             <a:r>
               <a:rPr lang="en-US" sz="1300" dirty="0">
                 <a:solidFill>
-                  <a:srgbClr val="7A736F"/>
+                  <a:srgbClr val="6E7B70"/>
                 </a:solidFill>
               </a:rPr>
               <a:t>разрабатывают такие курсы, Татарстан среди пилотных</a:t>
@@ -2058,7 +2058,7 @@
             </a:avLst>
           </a:prstGeom>
           <a:solidFill>
-            <a:srgbClr val="EFF3F1"/>
+            <a:srgbClr val="EEF3EC"/>
           </a:solidFill>
           <a:ln/>
         </p:spPr>
@@ -2072,7 +2072,7 @@
             <a:r>
               <a:rPr lang="en-US" sz="1700" b="1" dirty="0">
                 <a:solidFill>
-                  <a:srgbClr val="4A2420"/>
+                  <a:srgbClr val="1C3A24"/>
                 </a:solidFill>
               </a:rPr>
               <a:t>В чём сложность</a:t>
@@ -2139,7 +2139,7 @@
             <a:lvl1pPr>
               <a:defRPr sz="1000">
                 <a:solidFill>
-                  <a:srgbClr val="7A736F"/>
+                  <a:srgbClr val="6E7B70"/>
                 </a:solidFill>
               </a:defRPr>
             </a:lvl1pPr>
@@ -2206,7 +2206,7 @@
             <a:r>
               <a:rPr lang="en-US" sz="3800" b="1" dirty="0">
                 <a:solidFill>
-                  <a:srgbClr val="4A2420"/>
+                  <a:srgbClr val="1C3A24"/>
                 </a:solidFill>
               </a:rPr>
               <a:t>История как игра, а не параграф</a:t>
@@ -2236,7 +2236,7 @@
           </a:solidFill>
           <a:ln w="12700">
             <a:solidFill>
-              <a:srgbClr val="E0D9D4"/>
+              <a:srgbClr val="DCE4DA"/>
             </a:solidFill>
           </a:ln>
         </p:spPr>
@@ -2250,7 +2250,7 @@
             <a:r>
               <a:rPr lang="en-US" sz="1600" b="1" dirty="0">
                 <a:solidFill>
-                  <a:srgbClr val="B85042"/>
+                  <a:srgbClr val="2C5F2D"/>
                 </a:solidFill>
               </a:rPr>
               <a:t>10+ уровней</a:t>
@@ -2308,7 +2308,7 @@
           </a:solidFill>
           <a:ln w="12700">
             <a:solidFill>
-              <a:srgbClr val="E0D9D4"/>
+              <a:srgbClr val="DCE4DA"/>
             </a:solidFill>
           </a:ln>
         </p:spPr>
@@ -2322,7 +2322,7 @@
             <a:r>
               <a:rPr lang="en-US" sz="1600" b="1" dirty="0">
                 <a:solidFill>
-                  <a:srgbClr val="B85042"/>
+                  <a:srgbClr val="2C5F2D"/>
                 </a:solidFill>
               </a:rPr>
               <a:t>7 мини-игр</a:t>
@@ -2380,7 +2380,7 @@
           </a:solidFill>
           <a:ln w="12700">
             <a:solidFill>
-              <a:srgbClr val="E0D9D4"/>
+              <a:srgbClr val="DCE4DA"/>
             </a:solidFill>
           </a:ln>
         </p:spPr>
@@ -2394,7 +2394,7 @@
             <a:r>
               <a:rPr lang="en-US" sz="1600" b="1" dirty="0">
                 <a:solidFill>
-                  <a:srgbClr val="B85042"/>
+                  <a:srgbClr val="2C5F2D"/>
                 </a:solidFill>
               </a:rPr>
               <a:t>22 достижения</a:t>
@@ -2452,7 +2452,7 @@
           </a:solidFill>
           <a:ln w="12700">
             <a:solidFill>
-              <a:srgbClr val="E0D9D4"/>
+              <a:srgbClr val="DCE4DA"/>
             </a:solidFill>
           </a:ln>
         </p:spPr>
@@ -2466,7 +2466,7 @@
             <a:r>
               <a:rPr lang="en-US" sz="1600" b="1" dirty="0">
                 <a:solidFill>
-                  <a:srgbClr val="B85042"/>
+                  <a:srgbClr val="2C5F2D"/>
                 </a:solidFill>
               </a:rPr>
               <a:t>Магазин</a:t>
@@ -2524,7 +2524,7 @@
           </a:solidFill>
           <a:ln w="12700">
             <a:solidFill>
-              <a:srgbClr val="E0D9D4"/>
+              <a:srgbClr val="DCE4DA"/>
             </a:solidFill>
           </a:ln>
         </p:spPr>
@@ -2538,7 +2538,7 @@
             <a:r>
               <a:rPr lang="en-US" sz="1600" b="1" dirty="0">
                 <a:solidFill>
-                  <a:srgbClr val="B85042"/>
+                  <a:srgbClr val="2C5F2D"/>
                 </a:solidFill>
               </a:rPr>
               <a:t>Таблица лидеров</a:t>
@@ -2596,7 +2596,7 @@
           </a:solidFill>
           <a:ln w="12700">
             <a:solidFill>
-              <a:srgbClr val="E0D9D4"/>
+              <a:srgbClr val="DCE4DA"/>
             </a:solidFill>
           </a:ln>
         </p:spPr>
@@ -2610,7 +2610,7 @@
             <a:r>
               <a:rPr lang="en-US" sz="1600" b="1" dirty="0">
                 <a:solidFill>
-                  <a:srgbClr val="B85042"/>
+                  <a:srgbClr val="2C5F2D"/>
                 </a:solidFill>
               </a:rPr>
               <a:t>Любое устройство</a:t>
@@ -2674,7 +2674,7 @@
             <a:r>
               <a:rPr lang="en-US" sz="1500" b="1" dirty="0">
                 <a:solidFill>
-                  <a:srgbClr val="4A2420"/>
+                  <a:srgbClr val="1C3A24"/>
                 </a:solidFill>
               </a:rPr>
               <a:t>Ребёнок играет — и запоминает последовательность эпох, а не отдельные даты</a:t>
@@ -2713,7 +2713,7 @@
             <a:lvl1pPr>
               <a:defRPr sz="1000">
                 <a:solidFill>
-                  <a:srgbClr val="7A736F"/>
+                  <a:srgbClr val="6E7B70"/>
                 </a:solidFill>
               </a:defRPr>
             </a:lvl1pPr>
@@ -2780,7 +2780,7 @@
             <a:r>
               <a:rPr lang="en-US" sz="3800" b="1" dirty="0">
                 <a:solidFill>
-                  <a:srgbClr val="4A2420"/>
+                  <a:srgbClr val="1C3A24"/>
                 </a:solidFill>
               </a:rPr>
               <a:t>Учитель ведёт класс, а не проверяет тетради</a:t>
@@ -2810,7 +2810,7 @@
           </a:solidFill>
           <a:ln w="12700">
             <a:solidFill>
-              <a:srgbClr val="E0D9D4"/>
+              <a:srgbClr val="DCE4DA"/>
             </a:solidFill>
           </a:ln>
         </p:spPr>
@@ -2824,7 +2824,7 @@
             <a:r>
               <a:rPr lang="en-US" sz="1800" b="1" dirty="0">
                 <a:solidFill>
-                  <a:srgbClr val="B85042"/>
+                  <a:srgbClr val="2C5F2D"/>
                 </a:solidFill>
               </a:rPr>
               <a:t>Роль «Ученик»</a:t>
@@ -2882,7 +2882,7 @@
           </a:solidFill>
           <a:ln w="12700">
             <a:solidFill>
-              <a:srgbClr val="E0D9D4"/>
+              <a:srgbClr val="DCE4DA"/>
             </a:solidFill>
           </a:ln>
         </p:spPr>
@@ -2896,7 +2896,7 @@
             <a:r>
               <a:rPr lang="en-US" sz="1800" b="1" dirty="0">
                 <a:solidFill>
-                  <a:srgbClr val="B85042"/>
+                  <a:srgbClr val="2C5F2D"/>
                 </a:solidFill>
               </a:rPr>
               <a:t>Роль «Учитель»</a:t>
@@ -2950,7 +2950,7 @@
             </a:avLst>
           </a:prstGeom>
           <a:solidFill>
-            <a:srgbClr val="B85042"/>
+            <a:srgbClr val="2C5F2D"/>
           </a:solidFill>
           <a:ln/>
         </p:spPr>
@@ -2992,7 +2992,7 @@
             <a:r>
               <a:rPr lang="en-US" sz="1500" dirty="0">
                 <a:solidFill>
-                  <a:srgbClr val="F0E4E0"/>
+                  <a:srgbClr val="E2EFE0"/>
                 </a:solidFill>
               </a:rPr>
               <a:t>Решение принимает учитель, а не ученик. Поэтому в сервисе есть готовый кабинет учителя: класс заводится за пару минут, ничего устанавливать и согласовывать не нужно — достаточно открыть ссылку.</a:t>
@@ -3031,7 +3031,7 @@
             <a:lvl1pPr>
               <a:defRPr sz="1000">
                 <a:solidFill>
-                  <a:srgbClr val="7A736F"/>
+                  <a:srgbClr val="6E7B70"/>
                 </a:solidFill>
               </a:defRPr>
             </a:lvl1pPr>
@@ -3124,7 +3124,7 @@
             </a:avLst>
           </a:prstGeom>
           <a:solidFill>
-            <a:srgbClr val="6B332C"/>
+            <a:srgbClr val="2E5A38"/>
           </a:solidFill>
           <a:ln/>
         </p:spPr>
@@ -3166,7 +3166,7 @@
             <a:r>
               <a:rPr lang="en-US" sz="1300" dirty="0">
                 <a:solidFill>
-                  <a:srgbClr val="D8CBC6"/>
+                  <a:srgbClr val="D3E0D2"/>
                 </a:solidFill>
               </a:rPr>
               <a:t>один класс своей школы</a:t>
@@ -3192,7 +3192,7 @@
             </a:avLst>
           </a:prstGeom>
           <a:solidFill>
-            <a:srgbClr val="6B332C"/>
+            <a:srgbClr val="2E5A38"/>
           </a:solidFill>
           <a:ln/>
         </p:spPr>
@@ -3234,7 +3234,7 @@
             <a:r>
               <a:rPr lang="en-US" sz="1300" dirty="0">
                 <a:solidFill>
-                  <a:srgbClr val="D8CBC6"/>
+                  <a:srgbClr val="D3E0D2"/>
                 </a:solidFill>
               </a:rPr>
               <a:t>уровни до наших дней</a:t>
@@ -3260,7 +3260,7 @@
             </a:avLst>
           </a:prstGeom>
           <a:solidFill>
-            <a:srgbClr val="6B332C"/>
+            <a:srgbClr val="2E5A38"/>
           </a:solidFill>
           <a:ln/>
         </p:spPr>
@@ -3302,7 +3302,7 @@
             <a:r>
               <a:rPr lang="en-US" sz="1300" dirty="0">
                 <a:solidFill>
-                  <a:srgbClr val="D8CBC6"/>
+                  <a:srgbClr val="D3E0D2"/>
                 </a:solidFill>
               </a:rPr>
               <a:t>видно, кто отстал</a:t>
@@ -3319,7 +3319,7 @@
         </p:nvSpPr>
         <p:spPr>
           <a:xfrm>
-            <a:off x="640080" y="3611880"/>
+            <a:off x="640080" y="3520440"/>
             <a:ext cx="10881360" cy="457200"/>
           </a:xfrm>
           <a:prstGeom prst="rect">
@@ -3338,7 +3338,7 @@
             <a:r>
               <a:rPr lang="en-US" sz="1500" i="1" dirty="0">
                 <a:solidFill>
-                  <a:srgbClr val="D8CBC6"/>
+                  <a:srgbClr val="D3E0D2"/>
                 </a:solidFill>
               </a:rPr>
               <a:t>Курс по истории края ввели в 32 регионах — сделанное для Татарстана подойдёт и соседям</a:t>
@@ -3355,8 +3355,8 @@
         </p:nvSpPr>
         <p:spPr>
           <a:xfrm>
-            <a:off x="640080" y="4343400"/>
-            <a:ext cx="9144000" cy="2011680"/>
+            <a:off x="640080" y="4160520"/>
+            <a:ext cx="9144000" cy="1737360"/>
           </a:xfrm>
           <a:prstGeom prst="rect">
             <a:avLst/>
@@ -3374,7 +3374,7 @@
             <a:r>
               <a:rPr lang="en-US" sz="2200" b="1" dirty="0">
                 <a:solidFill>
-                  <a:srgbClr val="A7BEAE"/>
+                  <a:srgbClr val="97BC62"/>
                 </a:solidFill>
               </a:rPr>
               <a:t>tathistory.tatnet.app</a:t>
@@ -3388,7 +3388,7 @@
             <a:r>
               <a:rPr lang="en-US" sz="1500" dirty="0">
                 <a:solidFill>
-                  <a:srgbClr val="A89189"/>
+                  <a:srgbClr val="9BB09C"/>
                 </a:solidFill>
               </a:rPr>
               <a:t>Спасибо. Готов ответить на вопросы</a:t>
@@ -3416,10 +3416,10 @@
             <a:r>
               <a:rPr lang="en-US" sz="1300" dirty="0">
                 <a:solidFill>
-                  <a:srgbClr val="8F7870"/>
-                </a:solidFill>
-              </a:rPr>
-              <a:t>Фамилия Имя</a:t>
+                  <a:srgbClr val="7F9480"/>
+                </a:solidFill>
+              </a:rPr>
+              <a:t>Фаустов Радмир</a:t>
             </a:r>
             <a:endParaRPr lang="en-US" sz="2200" dirty="0"/>
           </a:p>
@@ -3430,7 +3430,7 @@
             <a:r>
               <a:rPr lang="en-US" sz="1300" dirty="0">
                 <a:solidFill>
-                  <a:srgbClr val="8F7870"/>
+                  <a:srgbClr val="7F9480"/>
                 </a:solidFill>
               </a:rPr>
               <a:t>Лицей-интернат имени Мустафы Онджеля</a:t>
@@ -3452,40 +3452,40 @@
   <a:themeElements>
     <a:clrScheme name="TatHistory">
       <a:dk1>
-        <a:srgbClr val="231512"/>
+        <a:srgbClr val="16231A"/>
       </a:dk1>
       <a:lt1>
         <a:srgbClr val="FFFFFF"/>
       </a:lt1>
       <a:dk2>
-        <a:srgbClr val="4A2420"/>
+        <a:srgbClr val="1C3A24"/>
       </a:dk2>
       <a:lt2>
-        <a:srgbClr val="EFF3F1"/>
+        <a:srgbClr val="EEF3EC"/>
       </a:lt2>
       <a:accent1>
-        <a:srgbClr val="B85042"/>
+        <a:srgbClr val="2C5F2D"/>
       </a:accent1>
       <a:accent2>
-        <a:srgbClr val="7A4A3F"/>
+        <a:srgbClr val="24502A"/>
       </a:accent2>
       <a:accent3>
-        <a:srgbClr val="7A736F"/>
+        <a:srgbClr val="6E7B70"/>
       </a:accent3>
       <a:accent4>
-        <a:srgbClr val="A7BEAE"/>
+        <a:srgbClr val="97BC62"/>
       </a:accent4>
       <a:accent5>
-        <a:srgbClr val="8C3A2E"/>
+        <a:srgbClr val="1F4621"/>
       </a:accent5>
       <a:accent6>
-        <a:srgbClr val="E0D9D4"/>
+        <a:srgbClr val="DCE4DA"/>
       </a:accent6>
       <a:hlink>
-        <a:srgbClr val="B85042"/>
+        <a:srgbClr val="2C5F2D"/>
       </a:hlink>
       <a:folHlink>
-        <a:srgbClr val="7A736F"/>
+        <a:srgbClr val="6E7B70"/>
       </a:folHlink>
     </a:clrScheme>
     <a:fontScheme name="TatHistory">
